--- a/koreatech-db/weeks/11주차_설계와_정규화.pptx
+++ b/koreatech-db/weeks/11주차_설계와_정규화.pptx
@@ -6122,9 +6122,9 @@
                 <a:solidFill>
                   <a:srgbClr val="E6EAF2"/>
                 </a:solidFill>
-                <a:latin typeface="나눔고딕코딩"/>
-                <a:ea typeface="나눔고딕코딩"/>
-                <a:cs typeface="나눔고딕코딩"/>
+                <a:latin typeface="D2Coding"/>
+                <a:ea typeface="D2Coding"/>
+                <a:cs typeface="D2Coding"/>
               </a:rPr>
               <a:t>주문서 (주문번호, 상품번호, 주문일, 고객번호, 고객명, 등급, 상품명, 수량, 단가)</a:t>
             </a:r>
@@ -6140,9 +6140,9 @@
                 <a:solidFill>
                   <a:srgbClr val="E6EAF2"/>
                 </a:solidFill>
-                <a:latin typeface="나눔고딕코딩"/>
-                <a:ea typeface="나눔고딕코딩"/>
-                <a:cs typeface="나눔고딕코딩"/>
+                <a:latin typeface="D2Coding"/>
+                <a:ea typeface="D2Coding"/>
+                <a:cs typeface="D2Coding"/>
               </a:rPr>
               <a:t/>
             </a:r>
@@ -6158,9 +6158,9 @@
                 <a:solidFill>
                   <a:srgbClr val="E6EAF2"/>
                 </a:solidFill>
-                <a:latin typeface="나눔고딕코딩"/>
-                <a:ea typeface="나눔고딕코딩"/>
-                <a:cs typeface="나눔고딕코딩"/>
+                <a:latin typeface="D2Coding"/>
+                <a:ea typeface="D2Coding"/>
+                <a:cs typeface="D2Coding"/>
               </a:rPr>
               <a:t>  주문번호          → 주문일, 고객번호            ← 부분 종속 (기본키 일부)</a:t>
             </a:r>
@@ -6176,9 +6176,9 @@
                 <a:solidFill>
                   <a:srgbClr val="E6EAF2"/>
                 </a:solidFill>
-                <a:latin typeface="나눔고딕코딩"/>
-                <a:ea typeface="나눔고딕코딩"/>
-                <a:cs typeface="나눔고딕코딩"/>
+                <a:latin typeface="D2Coding"/>
+                <a:ea typeface="D2Coding"/>
+                <a:cs typeface="D2Coding"/>
               </a:rPr>
               <a:t>  상품번호          → 상품명                      ← 부분 종속</a:t>
             </a:r>
@@ -6194,9 +6194,9 @@
                 <a:solidFill>
                   <a:srgbClr val="E6EAF2"/>
                 </a:solidFill>
-                <a:latin typeface="나눔고딕코딩"/>
-                <a:ea typeface="나눔고딕코딩"/>
-                <a:cs typeface="나눔고딕코딩"/>
+                <a:latin typeface="D2Coding"/>
+                <a:ea typeface="D2Coding"/>
+                <a:cs typeface="D2Coding"/>
               </a:rPr>
               <a:t>  고객번호          → 고객명, 등급                ← 이행적 종속의 원인</a:t>
             </a:r>
@@ -6212,9 +6212,9 @@
                 <a:solidFill>
                   <a:srgbClr val="E6EAF2"/>
                 </a:solidFill>
-                <a:latin typeface="나눔고딕코딩"/>
-                <a:ea typeface="나눔고딕코딩"/>
-                <a:cs typeface="나눔고딕코딩"/>
+                <a:latin typeface="D2Coding"/>
+                <a:ea typeface="D2Coding"/>
+                <a:cs typeface="D2Coding"/>
               </a:rPr>
               <a:t>  (주문번호,상품번호) → 수량, 단가                ← 완전 종속 ✓</a:t>
             </a:r>
@@ -9435,9 +9435,9 @@
                 <a:solidFill>
                   <a:srgbClr val="E6EAF2"/>
                 </a:solidFill>
-                <a:latin typeface="나눔고딕코딩"/>
-                <a:ea typeface="나눔고딕코딩"/>
-                <a:cs typeface="나눔고딕코딩"/>
+                <a:latin typeface="D2Coding"/>
+                <a:ea typeface="D2Coding"/>
+                <a:cs typeface="D2Coding"/>
               </a:rPr>
               <a:t>주문서 (주문번호, 주문일, 고객번호, 고객명, 등급, [상품번호, 상품명, 단가, 수량] ...)</a:t>
             </a:r>
@@ -9453,9 +9453,9 @@
                 <a:solidFill>
                   <a:srgbClr val="E6EAF2"/>
                 </a:solidFill>
-                <a:latin typeface="나눔고딕코딩"/>
-                <a:ea typeface="나눔고딕코딩"/>
-                <a:cs typeface="나눔고딕코딩"/>
+                <a:latin typeface="D2Coding"/>
+                <a:ea typeface="D2Coding"/>
+                <a:cs typeface="D2Coding"/>
               </a:rPr>
               <a:t/>
             </a:r>
@@ -9471,9 +9471,9 @@
                 <a:solidFill>
                   <a:srgbClr val="E6EAF2"/>
                 </a:solidFill>
-                <a:latin typeface="나눔고딕코딩"/>
-                <a:ea typeface="나눔고딕코딩"/>
-                <a:cs typeface="나눔고딕코딩"/>
+                <a:latin typeface="D2Coding"/>
+                <a:ea typeface="D2Coding"/>
+                <a:cs typeface="D2Coding"/>
               </a:rPr>
               <a:t> 1001 | 2026-01-10 | C001 | 한가람 | VIP | P001,P003 | 무선 전기포트,유기농 원두 500g | 42000,18500 | 1,2</a:t>
             </a:r>
@@ -9489,9 +9489,9 @@
                 <a:solidFill>
                   <a:srgbClr val="E6EAF2"/>
                 </a:solidFill>
-                <a:latin typeface="나눔고딕코딩"/>
-                <a:ea typeface="나눔고딕코딩"/>
-                <a:cs typeface="나눔고딕코딩"/>
+                <a:latin typeface="D2Coding"/>
+                <a:ea typeface="D2Coding"/>
+                <a:cs typeface="D2Coding"/>
               </a:rPr>
               <a:t/>
             </a:r>
@@ -9507,9 +9507,9 @@
                 <a:solidFill>
                   <a:srgbClr val="E6EAF2"/>
                 </a:solidFill>
-                <a:latin typeface="나눔고딕코딩"/>
-                <a:ea typeface="나눔고딕코딩"/>
-                <a:cs typeface="나눔고딕코딩"/>
+                <a:latin typeface="D2Coding"/>
+                <a:ea typeface="D2Coding"/>
+                <a:cs typeface="D2Coding"/>
               </a:rPr>
               <a:t>   → 상품 칸에 여러 값이 들어 있어 원자값이 아니다 (수량 합계조차 SQL로 못 구한다)</a:t>
             </a:r>
@@ -10442,9 +10442,9 @@
                 <a:solidFill>
                   <a:srgbClr val="E6EAF2"/>
                 </a:solidFill>
-                <a:latin typeface="나눔고딕코딩"/>
-                <a:ea typeface="나눔고딕코딩"/>
-                <a:cs typeface="나눔고딕코딩"/>
+                <a:latin typeface="D2Coding"/>
+                <a:ea typeface="D2Coding"/>
+                <a:cs typeface="D2Coding"/>
               </a:rPr>
               <a:t>주문   (주문번호, 주문일, 고객번호, 고객명, 등급)   ← 주문번호 → 주문일, 고객…</a:t>
             </a:r>
@@ -10460,9 +10460,9 @@
                 <a:solidFill>
                   <a:srgbClr val="E6EAF2"/>
                 </a:solidFill>
-                <a:latin typeface="나눔고딕코딩"/>
-                <a:ea typeface="나눔고딕코딩"/>
-                <a:cs typeface="나눔고딕코딩"/>
+                <a:latin typeface="D2Coding"/>
+                <a:ea typeface="D2Coding"/>
+                <a:cs typeface="D2Coding"/>
               </a:rPr>
               <a:t>상품   (상품번호, 상품명, 단가)                      ← 상품번호 → 상품명, 단가</a:t>
             </a:r>
@@ -10478,9 +10478,9 @@
                 <a:solidFill>
                   <a:srgbClr val="E6EAF2"/>
                 </a:solidFill>
-                <a:latin typeface="나눔고딕코딩"/>
-                <a:ea typeface="나눔고딕코딩"/>
-                <a:cs typeface="나눔고딕코딩"/>
+                <a:latin typeface="D2Coding"/>
+                <a:ea typeface="D2Coding"/>
+                <a:cs typeface="D2Coding"/>
               </a:rPr>
               <a:t>주문상세 (주문번호, 상품번호, 수량, 단가)            ← (주문번호,상품번호) → 수량 ✓</a:t>
             </a:r>
@@ -10496,9 +10496,9 @@
                 <a:solidFill>
                   <a:srgbClr val="E6EAF2"/>
                 </a:solidFill>
-                <a:latin typeface="나눔고딕코딩"/>
-                <a:ea typeface="나눔고딕코딩"/>
-                <a:cs typeface="나눔고딕코딩"/>
+                <a:latin typeface="D2Coding"/>
+                <a:ea typeface="D2Coding"/>
+                <a:cs typeface="D2Coding"/>
               </a:rPr>
               <a:t/>
             </a:r>
@@ -10514,9 +10514,9 @@
                 <a:solidFill>
                   <a:srgbClr val="E6EAF2"/>
                 </a:solidFill>
-                <a:latin typeface="나눔고딕코딩"/>
-                <a:ea typeface="나눔고딕코딩"/>
-                <a:cs typeface="나눔고딕코딩"/>
+                <a:latin typeface="D2Coding"/>
+                <a:ea typeface="D2Coding"/>
+                <a:cs typeface="D2Coding"/>
               </a:rPr>
               <a:t> ▸ 남은 문제: 주문 테이블에서 주문번호 → 고객번호 → 고객명, 등급</a:t>
             </a:r>
@@ -10532,9 +10532,9 @@
                 <a:solidFill>
                   <a:srgbClr val="E6EAF2"/>
                 </a:solidFill>
-                <a:latin typeface="나눔고딕코딩"/>
-                <a:ea typeface="나눔고딕코딩"/>
-                <a:cs typeface="나눔고딕코딩"/>
+                <a:latin typeface="D2Coding"/>
+                <a:ea typeface="D2Coding"/>
+                <a:cs typeface="D2Coding"/>
               </a:rPr>
               <a:t>             (이행적 함수 종속 — 고객 정보가 아직 주문마다 반복된다)</a:t>
             </a:r>
@@ -11008,9 +11008,9 @@
                 <a:solidFill>
                   <a:srgbClr val="E6EAF2"/>
                 </a:solidFill>
-                <a:latin typeface="나눔고딕코딩"/>
-                <a:ea typeface="나눔고딕코딩"/>
-                <a:cs typeface="나눔고딕코딩"/>
+                <a:latin typeface="D2Coding"/>
+                <a:ea typeface="D2Coding"/>
+                <a:cs typeface="D2Coding"/>
               </a:rPr>
               <a:t>고객   (고객번호, 고객명, 등급, ...)          = customers</a:t>
             </a:r>
@@ -11026,9 +11026,9 @@
                 <a:solidFill>
                   <a:srgbClr val="E6EAF2"/>
                 </a:solidFill>
-                <a:latin typeface="나눔고딕코딩"/>
-                <a:ea typeface="나눔고딕코딩"/>
-                <a:cs typeface="나눔고딕코딩"/>
+                <a:latin typeface="D2Coding"/>
+                <a:ea typeface="D2Coding"/>
+                <a:cs typeface="D2Coding"/>
               </a:rPr>
               <a:t>주문   (주문번호, 주문일, 고객번호)            = orders      FK: 고객번호</a:t>
             </a:r>
@@ -11044,9 +11044,9 @@
                 <a:solidFill>
                   <a:srgbClr val="E6EAF2"/>
                 </a:solidFill>
-                <a:latin typeface="나눔고딕코딩"/>
-                <a:ea typeface="나눔고딕코딩"/>
-                <a:cs typeface="나눔고딕코딩"/>
+                <a:latin typeface="D2Coding"/>
+                <a:ea typeface="D2Coding"/>
+                <a:cs typeface="D2Coding"/>
               </a:rPr>
               <a:t>상품   (상품번호, 상품명, 단가, ...)          = products</a:t>
             </a:r>
@@ -11062,9 +11062,9 @@
                 <a:solidFill>
                   <a:srgbClr val="E6EAF2"/>
                 </a:solidFill>
-                <a:latin typeface="나눔고딕코딩"/>
-                <a:ea typeface="나눔고딕코딩"/>
-                <a:cs typeface="나눔고딕코딩"/>
+                <a:latin typeface="D2Coding"/>
+                <a:ea typeface="D2Coding"/>
+                <a:cs typeface="D2Coding"/>
               </a:rPr>
               <a:t>주문상세 (주문번호, 상품번호, 수량, 단가)      = order_items  FK: 주문번호, 상품번호</a:t>
             </a:r>
@@ -11080,9 +11080,9 @@
                 <a:solidFill>
                   <a:srgbClr val="E6EAF2"/>
                 </a:solidFill>
-                <a:latin typeface="나눔고딕코딩"/>
-                <a:ea typeface="나눔고딕코딩"/>
-                <a:cs typeface="나눔고딕코딩"/>
+                <a:latin typeface="D2Coding"/>
+                <a:ea typeface="D2Coding"/>
+                <a:cs typeface="D2Coding"/>
               </a:rPr>
               <a:t/>
             </a:r>
@@ -11098,9 +11098,9 @@
                 <a:solidFill>
                   <a:srgbClr val="E6EAF2"/>
                 </a:solidFill>
-                <a:latin typeface="나눔고딕코딩"/>
-                <a:ea typeface="나눔고딕코딩"/>
-                <a:cs typeface="나눔고딕코딩"/>
+                <a:latin typeface="D2Coding"/>
+                <a:ea typeface="D2Coding"/>
+                <a:cs typeface="D2Coding"/>
               </a:rPr>
               <a:t> ▸ 이제 고객 등급을 바꿀 때 customers 한 행만 수정하면 된다 (갱신 이상 해소)</a:t>
             </a:r>
@@ -11116,9 +11116,9 @@
                 <a:solidFill>
                   <a:srgbClr val="E6EAF2"/>
                 </a:solidFill>
-                <a:latin typeface="나눔고딕코딩"/>
-                <a:ea typeface="나눔고딕코딩"/>
-                <a:cs typeface="나눔고딕코딩"/>
+                <a:latin typeface="D2Coding"/>
+                <a:ea typeface="D2Coding"/>
+                <a:cs typeface="D2Coding"/>
               </a:rPr>
               <a:t> ▸ 주문이 없는 고객도 customers에 등록할 수 있다 (삽입 이상 해소)</a:t>
             </a:r>
